--- a/public/sample.pptx
+++ b/public/sample.pptx
@@ -1247,7 +1247,7 @@
                   <a:srgbClr val="53614D"/>
                 </a:solidFill>
               </a:rPr>
-              <a:t>The quarterly story, minus the corporate wallpaper.</a:t>
+              <a:t>In order to grow, we need to utilize what we learn.</a:t>
             </a:r>
             <a:endParaRPr lang="en-US" sz="1800" dirty="0"/>
           </a:p>
